--- a/刘志彪_产业经济学_第13章_产业关联(产业控制力主线精编).pptx
+++ b/刘志彪_产业经济学_第13章_产业关联(产业控制力主线精编).pptx
@@ -9002,7 +9002,7 @@
               </a:defRPr>
             </a:pPr>
             <a:r>
-              <a:t>第二节 直接消耗系数 ($a_{ij}$) 计算与经济含义</a:t>
+              <a:t>第二节 直接消耗系数 ($a(ij)$) 计算与经济含义</a:t>
             </a:r>
           </a:p>
         </p:txBody>
@@ -9218,22 +9218,7 @@
               </a:spcAft>
             </a:pPr>
             <a:r>
-              <a:rPr b="1" sz="1250">
-                <a:solidFill>
-                  <a:srgbClr val="1E293B"/>
-                </a:solidFill>
-                <a:latin typeface="微软雅黑"/>
-              </a:rPr>
-              <a:t>计算公式：</a:t>
-            </a:r>
-            <a:r>
-              <a:rPr sz="1250">
-                <a:solidFill>
-                  <a:srgbClr val="1E293B"/>
-                </a:solidFill>
-                <a:latin typeface="宋体"/>
-              </a:rPr>
-              <a:t>a_{ij} = x_{ij} / X_j (部门 j 生产单位产品直接消耗部门 i 产品的数量)。</a:t>
+              <a:t>计算公式：a(ij) = x(ij) / X_j (部门 j 生产单位产品直接消耗部门 i 产品的数量)。</a:t>
             </a:r>
           </a:p>
           <a:p>
@@ -9243,22 +9228,7 @@
               </a:spcAft>
             </a:pPr>
             <a:r>
-              <a:rPr b="1" sz="1250">
-                <a:solidFill>
-                  <a:srgbClr val="1E293B"/>
-                </a:solidFill>
-                <a:latin typeface="微软雅黑"/>
-              </a:rPr>
-              <a:t>矩阵表达：</a:t>
-            </a:r>
-            <a:r>
-              <a:rPr sz="1250">
-                <a:solidFill>
-                  <a:srgbClr val="1E293B"/>
-                </a:solidFill>
-                <a:latin typeface="宋体"/>
-              </a:rPr>
-              <a:t>A = (a_{ij})_{N * N}，称为直接消耗系数矩阵。</a:t>
+              <a:t>矩阵表达：A = (a(ij))(N * N)，称为直接消耗系数矩阵。</a:t>
             </a:r>
           </a:p>
         </p:txBody>
@@ -9395,22 +9365,7 @@
               </a:spcAft>
             </a:pPr>
             <a:r>
-              <a:rPr b="1" sz="1250">
-                <a:solidFill>
-                  <a:srgbClr val="1E293B"/>
-                </a:solidFill>
-                <a:latin typeface="微软雅黑"/>
-              </a:rPr>
-              <a:t>含义：</a:t>
-            </a:r>
-            <a:r>
-              <a:rPr sz="1250">
-                <a:solidFill>
-                  <a:srgbClr val="1E293B"/>
-                </a:solidFill>
-                <a:latin typeface="宋体"/>
-              </a:rPr>
-              <a:t>a_{ij} 取决于特定时期的生产技术水平，技术进步会导致 A 矩阵系数发生变动。</a:t>
+              <a:t>含义：a(ij) 取决于特定时期的生产技术水平，技术进步会导致 A 矩阵系数发生变动。</a:t>
             </a:r>
           </a:p>
         </p:txBody>
@@ -9876,22 +9831,7 @@
               </a:spcAft>
             </a:pPr>
             <a:r>
-              <a:rPr b="1" sz="1250">
-                <a:solidFill>
-                  <a:srgbClr val="1E293B"/>
-                </a:solidFill>
-                <a:latin typeface="微软雅黑"/>
-              </a:rPr>
-              <a:t>基本方程：</a:t>
-            </a:r>
-            <a:r>
-              <a:rPr sz="1250">
-                <a:solidFill>
-                  <a:srgbClr val="1E293B"/>
-                </a:solidFill>
-                <a:latin typeface="宋体"/>
-              </a:rPr>
-              <a:t>A X + Y = X  =&gt;  (I - A) X = Y  =&gt;  X = (I - A)^{-1} Y。</a:t>
+              <a:t>基本方程：A X + Y = X  =&gt;  (I - A) X = Y  =&gt;  X = (I - A)^-1 Y。</a:t>
             </a:r>
           </a:p>
           <a:p>
@@ -9901,22 +9841,7 @@
               </a:spcAft>
             </a:pPr>
             <a:r>
-              <a:rPr b="1" sz="1250">
-                <a:solidFill>
-                  <a:srgbClr val="1E293B"/>
-                </a:solidFill>
-                <a:latin typeface="微软雅黑"/>
-              </a:rPr>
-              <a:t>含义：</a:t>
-            </a:r>
-            <a:r>
-              <a:rPr sz="1250">
-                <a:solidFill>
-                  <a:srgbClr val="1E293B"/>
-                </a:solidFill>
-                <a:latin typeface="宋体"/>
-              </a:rPr>
-              <a:t>B = (I - A)^{-1} 称为里昂惕夫逆矩阵！矩阵元素 b_{ij} 反映了最终需求 Y_j 增加 1 单位对部门 i 总产出的完全拉动效应！</a:t>
+              <a:t>含义：B = (I - A)^-1 称为里昂惕夫逆矩阵！矩阵元素 b(ij) 反映了最终需求 Y_j 增加 1 单位对部门 i 总产出的完全拉动效应！</a:t>
             </a:r>
           </a:p>
         </p:txBody>
@@ -10230,22 +10155,7 @@
               </a:spcAft>
             </a:pPr>
             <a:r>
-              <a:rPr b="1" sz="1250">
-                <a:solidFill>
-                  <a:srgbClr val="1E293B"/>
-                </a:solidFill>
-                <a:latin typeface="微软雅黑"/>
-              </a:rPr>
-              <a:t>公式：</a:t>
-            </a:r>
-            <a:r>
-              <a:rPr sz="1250">
-                <a:solidFill>
-                  <a:srgbClr val="1E293B"/>
-                </a:solidFill>
-                <a:latin typeface="宋体"/>
-              </a:rPr>
-              <a:t>E_i = (sum_j b_{ij} / N) / (sum_i sum_j b_{ij} / N^2)。</a:t>
+              <a:t>公式：E_i = (sum_j b(ij) / N) / (sum_i sum_j b(ij) / N²)。</a:t>
             </a:r>
           </a:p>
           <a:p>
@@ -10761,22 +10671,7 @@
               </a:spcAft>
             </a:pPr>
             <a:r>
-              <a:rPr b="1" sz="1250">
-                <a:solidFill>
-                  <a:srgbClr val="1E293B"/>
-                </a:solidFill>
-                <a:latin typeface="微软雅黑"/>
-              </a:rPr>
-              <a:t>公式：</a:t>
-            </a:r>
-            <a:r>
-              <a:rPr sz="1250">
-                <a:solidFill>
-                  <a:srgbClr val="1E293B"/>
-                </a:solidFill>
-                <a:latin typeface="宋体"/>
-              </a:rPr>
-              <a:t>F_j = (sum_i b_{ij} / N) / (sum_i sum_j b_{ij} / N^2)。</a:t>
+              <a:t>公式：F_j = (sum_i b(ij) / N) / (sum_i sum_j b(ij) / N²)。</a:t>
             </a:r>
           </a:p>
           <a:p>
@@ -11292,22 +11187,7 @@
               </a:spcAft>
             </a:pPr>
             <a:r>
-              <a:rPr b="1" sz="1250">
-                <a:solidFill>
-                  <a:srgbClr val="1E293B"/>
-                </a:solidFill>
-                <a:latin typeface="微软雅黑"/>
-              </a:rPr>
-              <a:t>方程：</a:t>
-            </a:r>
-            <a:r>
-              <a:rPr sz="1250">
-                <a:solidFill>
-                  <a:srgbClr val="1E293B"/>
-                </a:solidFill>
-                <a:latin typeface="宋体"/>
-              </a:rPr>
-              <a:t>Delta P = (I - A^T)^{-1} * Delta V。</a:t>
+              <a:t>方程：Delta P = (I - A^T)^-1 * Delta V。</a:t>
             </a:r>
           </a:p>
           <a:p>
